--- a/progetto-snodi/corsi/edu-genai-2/incontri/06-project-work.pptx
+++ b/progetto-snodi/corsi/edu-genai-2/incontri/06-project-work.pptx
@@ -12,9 +12,10 @@
     <p:sldId id="260" r:id="rId6"/>
     <p:sldId id="261" r:id="rId7"/>
     <p:sldId id="262" r:id="rId8"/>
+    <p:sldId id="263" r:id="rId9"/>
   </p:sldIdLst>
   <p:notesMasterIdLst>
-    <p:notesMasterId r:id="rId9"/>
+    <p:notesMasterId r:id="rId10"/>
   </p:notesMasterIdLst>
   <p:sldSz cx="12188952" cy="6858000"/>
   <p:notesSz cx="6858000" cy="12188952"/>
@@ -1036,7 +1037,7 @@
           <a:p>
             <a:r>
               <a:rPr lang="en-US" dirty="0"/>
-              <a:t>Compilazione del gradimento IN AULA (non 'a casa'): il tasso di risposta crolla dopo. Verificare le firme del registro per il calcolo del 70%. Chiudere ringraziando il tutor.</a:t>
+              <a:t>Ricapitolazione dell'intera bussola: sei tappe, sei ancore internazionali. Il dato 62/30 chiude sul mandato dei laboratori Tipologia B: portare la formazione dove i ragazzi già usano l'IA senza formazione. Aggancio naturale alle candidature.</a:t>
             </a:r>
             <a:endParaRPr lang="en-US" dirty="0"/>
           </a:p>
@@ -1060,6 +1061,94 @@
             <a:fld id="{F7021451-1387-4CA6-816F-3879F97B5CBC}" type="slidenum">
               <a:rPr lang="en-US"/>
               <a:t>7</a:t>
+            </a:fld>
+            <a:endParaRPr lang="en-US"/>
+          </a:p>
+        </p:txBody>
+      </p:sp>
+    </p:spTree>
+    <p:extLst>
+      <p:ext uri="{BB962C8B-B14F-4D97-AF65-F5344CB8AC3E}">
+        <p14:creationId xmlns:p14="http://schemas.microsoft.com/office/powerpoint/2010/main" val="1024086991"/>
+      </p:ext>
+    </p:extLst>
+  </p:cSld>
+  <p:clrMapOvr>
+    <a:masterClrMapping/>
+  </p:clrMapOvr>
+</p:notes>
+</file>
+
+<file path=ppt/notesSlides/notesSlide8.xml><?xml version="1.0" encoding="utf-8"?>
+<p:notes xmlns:a="http://schemas.openxmlformats.org/drawingml/2006/main" xmlns:r="http://schemas.openxmlformats.org/officeDocument/2006/relationships" xmlns:p="http://schemas.openxmlformats.org/presentationml/2006/main">
+  <p:cSld>
+    <p:spTree>
+      <p:nvGrpSpPr>
+        <p:cNvPr id="1" name=""/>
+        <p:cNvGrpSpPr/>
+        <p:nvPr/>
+      </p:nvGrpSpPr>
+      <p:grpSpPr>
+        <a:xfrm>
+          <a:off x="0" y="0"/>
+          <a:ext cx="0" cy="0"/>
+          <a:chOff x="0" y="0"/>
+          <a:chExt cx="0" cy="0"/>
+        </a:xfrm>
+      </p:grpSpPr>
+      <p:sp>
+        <p:nvSpPr>
+          <p:cNvPr id="2" name="Slide Image Placeholder 1"/>
+          <p:cNvSpPr>
+            <a:spLocks noGrp="1" noRot="1" noChangeAspect="1"/>
+          </p:cNvSpPr>
+          <p:nvPr>
+            <p:ph type="sldImg"/>
+          </p:nvPr>
+        </p:nvSpPr>
+        <p:spPr/>
+      </p:sp>
+      <p:sp>
+        <p:nvSpPr>
+          <p:cNvPr id="3" name="Notes Placeholder 2"/>
+          <p:cNvSpPr>
+            <a:spLocks noGrp="1"/>
+          </p:cNvSpPr>
+          <p:nvPr>
+            <p:ph type="body" idx="1"/>
+          </p:nvPr>
+        </p:nvSpPr>
+        <p:spPr/>
+        <p:txBody>
+          <a:bodyPr/>
+          <a:lstStyle/>
+          <a:p>
+            <a:r>
+              <a:rPr lang="en-US" dirty="0"/>
+              <a:t>Compilazione del gradimento IN AULA (non 'a casa'): il tasso di risposta crolla dopo. Verificare le firme del registro per il calcolo del 70%. Chiudere ringraziando il tutor.</a:t>
+            </a:r>
+            <a:endParaRPr lang="en-US" dirty="0"/>
+          </a:p>
+        </p:txBody>
+      </p:sp>
+      <p:sp>
+        <p:nvSpPr>
+          <p:cNvPr id="4" name="Slide Number Placeholder 3"/>
+          <p:cNvSpPr>
+            <a:spLocks noGrp="1"/>
+          </p:cNvSpPr>
+          <p:nvPr>
+            <p:ph type="sldNum" sz="quarter" idx="10"/>
+          </p:nvPr>
+        </p:nvSpPr>
+        <p:spPr/>
+        <p:txBody>
+          <a:bodyPr/>
+          <a:lstStyle/>
+          <a:p>
+            <a:fld id="{F7021451-1387-4CA6-816F-3879F97B5CBC}" type="slidenum">
+              <a:rPr lang="en-US"/>
+              <a:t>8</a:t>
             </a:fld>
             <a:endParaRPr lang="en-US"/>
           </a:p>
@@ -4507,6 +4596,479 @@
     <p:bg>
       <p:bgPr>
         <a:solidFill>
+          <a:srgbClr val="FFFFFF"/>
+        </a:solidFill>
+      </p:bgPr>
+    </p:bg>
+    <p:spTree>
+      <p:nvGrpSpPr>
+        <p:cNvPr id="1" name=""/>
+        <p:cNvGrpSpPr/>
+        <p:nvPr/>
+      </p:nvGrpSpPr>
+      <p:grpSpPr>
+        <a:xfrm>
+          <a:off x="0" y="0"/>
+          <a:ext cx="0" cy="0"/>
+          <a:chOff x="0" y="0"/>
+          <a:chExt cx="0" cy="0"/>
+        </a:xfrm>
+      </p:grpSpPr>
+      <p:sp>
+        <p:nvSpPr>
+          <p:cNvPr id="2" name="Shape 0"/>
+          <p:cNvSpPr/>
+          <p:nvPr/>
+        </p:nvSpPr>
+        <p:spPr>
+          <a:xfrm>
+            <a:off x="502920" y="384048"/>
+            <a:ext cx="566928" cy="566928"/>
+          </a:xfrm>
+          <a:prstGeom prst="ellipse">
+            <a:avLst/>
+          </a:prstGeom>
+          <a:solidFill>
+            <a:srgbClr val="1E2761"/>
+          </a:solidFill>
+          <a:ln w="12700">
+            <a:solidFill>
+              <a:srgbClr val="1E2761"/>
+            </a:solidFill>
+            <a:prstDash val="solid"/>
+          </a:ln>
+        </p:spPr>
+      </p:sp>
+      <p:sp>
+        <p:nvSpPr>
+          <p:cNvPr id="3" name="Text 1"/>
+          <p:cNvSpPr/>
+          <p:nvPr/>
+        </p:nvSpPr>
+        <p:spPr>
+          <a:xfrm>
+            <a:off x="502920" y="384048"/>
+            <a:ext cx="566928" cy="566928"/>
+          </a:xfrm>
+          <a:prstGeom prst="rect">
+            <a:avLst/>
+          </a:prstGeom>
+          <a:noFill/>
+          <a:ln/>
+        </p:spPr>
+        <p:txBody>
+          <a:bodyPr wrap="square" lIns="0" tIns="0" rIns="0" bIns="0" rtlCol="0" anchor="ctr"/>
+          <a:lstStyle/>
+          <a:p>
+            <a:pPr algn="ctr" indent="0" marL="0">
+              <a:buNone/>
+            </a:pPr>
+            <a:r>
+              <a:rPr lang="en-US" sz="1800" b="1" dirty="0">
+                <a:solidFill>
+                  <a:srgbClr val="FFFFFF"/>
+                </a:solidFill>
+                <a:latin typeface="Cambria" pitchFamily="34" charset="0"/>
+                <a:ea typeface="Cambria" pitchFamily="34" charset="-122"/>
+                <a:cs typeface="Cambria" pitchFamily="34" charset="-120"/>
+              </a:rPr>
+              <a:t>6</a:t>
+            </a:r>
+            <a:endParaRPr lang="en-US" sz="1800" dirty="0"/>
+          </a:p>
+        </p:txBody>
+      </p:sp>
+      <p:sp>
+        <p:nvSpPr>
+          <p:cNvPr id="4" name="Text 2"/>
+          <p:cNvSpPr/>
+          <p:nvPr/>
+        </p:nvSpPr>
+        <p:spPr>
+          <a:xfrm>
+            <a:off x="1234440" y="347472"/>
+            <a:ext cx="9601200" cy="274320"/>
+          </a:xfrm>
+          <a:prstGeom prst="rect">
+            <a:avLst/>
+          </a:prstGeom>
+          <a:noFill/>
+          <a:ln/>
+        </p:spPr>
+        <p:txBody>
+          <a:bodyPr wrap="square" lIns="0" tIns="0" rIns="0" bIns="0" rtlCol="0" anchor="ctr"/>
+          <a:lstStyle/>
+          <a:p>
+            <a:pPr indent="0" marL="0">
+              <a:buNone/>
+            </a:pPr>
+            <a:r>
+              <a:rPr lang="en-US" sz="1100" dirty="0">
+                <a:solidFill>
+                  <a:srgbClr val="5B6B7C"/>
+                </a:solidFill>
+                <a:latin typeface="Calibri" pitchFamily="34" charset="0"/>
+                <a:ea typeface="Calibri" pitchFamily="34" charset="-122"/>
+                <a:cs typeface="Calibri" pitchFamily="34" charset="-120"/>
+              </a:rPr>
+              <a:t>Edu-GenAI 2 — Didattica Aumentata e Data Literacy</a:t>
+            </a:r>
+            <a:endParaRPr lang="en-US" sz="1100" dirty="0"/>
+          </a:p>
+        </p:txBody>
+      </p:sp>
+      <p:sp>
+        <p:nvSpPr>
+          <p:cNvPr id="5" name="Text 3"/>
+          <p:cNvSpPr/>
+          <p:nvPr/>
+        </p:nvSpPr>
+        <p:spPr>
+          <a:xfrm>
+            <a:off x="1234440" y="566928"/>
+            <a:ext cx="10332720" cy="685800"/>
+          </a:xfrm>
+          <a:prstGeom prst="rect">
+            <a:avLst/>
+          </a:prstGeom>
+          <a:noFill/>
+          <a:ln/>
+        </p:spPr>
+        <p:txBody>
+          <a:bodyPr wrap="square" lIns="0" tIns="0" rIns="0" bIns="0" rtlCol="0" anchor="ctr"/>
+          <a:lstStyle/>
+          <a:p>
+            <a:pPr indent="0" marL="0">
+              <a:buNone/>
+            </a:pPr>
+            <a:r>
+              <a:rPr lang="en-US" sz="3000" b="1" dirty="0">
+                <a:solidFill>
+                  <a:srgbClr val="1E2761"/>
+                </a:solidFill>
+                <a:latin typeface="Cambria" pitchFamily="34" charset="0"/>
+                <a:ea typeface="Cambria" pitchFamily="34" charset="-122"/>
+                <a:cs typeface="Cambria" pitchFamily="34" charset="-120"/>
+              </a:rPr>
+              <a:t>Bussola internazionale 2026</a:t>
+            </a:r>
+            <a:endParaRPr lang="en-US" sz="3000" dirty="0"/>
+          </a:p>
+        </p:txBody>
+      </p:sp>
+      <p:sp>
+        <p:nvSpPr>
+          <p:cNvPr id="6" name="Text 4"/>
+          <p:cNvSpPr/>
+          <p:nvPr/>
+        </p:nvSpPr>
+        <p:spPr>
+          <a:xfrm>
+            <a:off x="822960" y="1600200"/>
+            <a:ext cx="6492240" cy="4754880"/>
+          </a:xfrm>
+          <a:prstGeom prst="rect">
+            <a:avLst/>
+          </a:prstGeom>
+          <a:noFill/>
+          <a:ln/>
+        </p:spPr>
+        <p:txBody>
+          <a:bodyPr wrap="square" lIns="0" tIns="0" rIns="0" bIns="0" rtlCol="0" anchor="t"/>
+          <a:lstStyle/>
+          <a:p>
+            <a:pPr marL="177800" indent="-177800">
+              <a:spcAft>
+                <a:spcPts val="800"/>
+              </a:spcAft>
+              <a:buSzPct val="100000"/>
+              <a:buChar char="•"/>
+            </a:pPr>
+            <a:r>
+              <a:rPr lang="en-US" sz="1500" b="1" dirty="0">
+                <a:solidFill>
+                  <a:srgbClr val="26303B"/>
+                </a:solidFill>
+                <a:latin typeface="Calibri" pitchFamily="34" charset="0"/>
+                <a:ea typeface="Calibri" pitchFamily="34" charset="-122"/>
+                <a:cs typeface="Calibri" pitchFamily="34" charset="-120"/>
+              </a:rPr>
+              <a:t>UNESCO — AI for Skills Development (2025–26): adattare valutazione e supervisione agli ecosistemi ibridi umano-IA — ciò che le vostre UdA con policy e anchor già fanno</a:t>
+            </a:r>
+            <a:endParaRPr lang="en-US" sz="1500" dirty="0"/>
+          </a:p>
+          <a:p>
+            <a:pPr marL="177800" indent="-177800">
+              <a:spcAft>
+                <a:spcPts val="800"/>
+              </a:spcAft>
+              <a:buSzPct val="100000"/>
+              <a:buChar char="•"/>
+            </a:pPr>
+            <a:r>
+              <a:rPr lang="en-US" sz="1500" dirty="0">
+                <a:solidFill>
+                  <a:srgbClr val="26303B"/>
+                </a:solidFill>
+                <a:latin typeface="Calibri" pitchFamily="34" charset="0"/>
+                <a:ea typeface="Calibri" pitchFamily="34" charset="-122"/>
+                <a:cs typeface="Calibri" pitchFamily="34" charset="-120"/>
+              </a:rPr>
+              <a:t>UNESCO-UNEVOC (TVET 2026): gli strumenti di autovalutazione della AI-readiness d'istituto e il registro dei rischi — i prossimi passi naturali per portare il metodo dal singolo docente alla scuola</a:t>
+            </a:r>
+            <a:endParaRPr lang="en-US" sz="1500" dirty="0"/>
+          </a:p>
+          <a:p>
+            <a:pPr marL="177800" indent="-177800">
+              <a:spcAft>
+                <a:spcPts val="800"/>
+              </a:spcAft>
+              <a:buSzPct val="100000"/>
+              <a:buChar char="•"/>
+            </a:pPr>
+            <a:r>
+              <a:rPr lang="en-US" sz="1500" dirty="0">
+                <a:solidFill>
+                  <a:srgbClr val="26303B"/>
+                </a:solidFill>
+                <a:latin typeface="Calibri" pitchFamily="34" charset="0"/>
+                <a:ea typeface="Calibri" pitchFamily="34" charset="-122"/>
+                <a:cs typeface="Calibri" pitchFamily="34" charset="-120"/>
+              </a:rPr>
+              <a:t>Il dato che vi porta fuori dall'aula: «il 62% dei giovani usa l'IA in contesti pratici di apprendimento e lavoro, ma solo il 30% ha ricevuto formazione formale» (UNESCO-UNEVOC 2025) — quel divario è il mandato dei laboratori con gli studenti</a:t>
+            </a:r>
+            <a:endParaRPr lang="en-US" sz="1500" dirty="0"/>
+          </a:p>
+        </p:txBody>
+      </p:sp>
+      <p:sp>
+        <p:nvSpPr>
+          <p:cNvPr id="7" name="Shape 5"/>
+          <p:cNvSpPr/>
+          <p:nvPr/>
+        </p:nvSpPr>
+        <p:spPr>
+          <a:xfrm>
+            <a:off x="7635240" y="1600200"/>
+            <a:ext cx="3977640" cy="4480560"/>
+          </a:xfrm>
+          <a:prstGeom prst="roundRect">
+            <a:avLst>
+              <a:gd name="adj" fmla="val 2069"/>
+            </a:avLst>
+          </a:prstGeom>
+          <a:solidFill>
+            <a:srgbClr val="E9F1FB"/>
+          </a:solidFill>
+          <a:ln w="12700">
+            <a:solidFill>
+              <a:srgbClr val="E9F1FB"/>
+            </a:solidFill>
+            <a:prstDash val="solid"/>
+          </a:ln>
+        </p:spPr>
+      </p:sp>
+      <p:sp>
+        <p:nvSpPr>
+          <p:cNvPr id="8" name="Text 6"/>
+          <p:cNvSpPr/>
+          <p:nvPr/>
+        </p:nvSpPr>
+        <p:spPr>
+          <a:xfrm>
+            <a:off x="7863840" y="1764792"/>
+            <a:ext cx="3520440" cy="320040"/>
+          </a:xfrm>
+          <a:prstGeom prst="rect">
+            <a:avLst/>
+          </a:prstGeom>
+          <a:noFill/>
+          <a:ln/>
+        </p:spPr>
+        <p:txBody>
+          <a:bodyPr wrap="square" lIns="0" tIns="0" rIns="0" bIns="0" rtlCol="0" anchor="ctr"/>
+          <a:lstStyle/>
+          <a:p>
+            <a:pPr indent="0" marL="0">
+              <a:buNone/>
+            </a:pPr>
+            <a:r>
+              <a:rPr lang="en-US" sz="1450" b="1" dirty="0">
+                <a:solidFill>
+                  <a:srgbClr val="1E2761"/>
+                </a:solidFill>
+                <a:latin typeface="Cambria" pitchFamily="34" charset="0"/>
+                <a:ea typeface="Cambria" pitchFamily="34" charset="-122"/>
+                <a:cs typeface="Cambria" pitchFamily="34" charset="-120"/>
+              </a:rPr>
+              <a:t>La bussola completa</a:t>
+            </a:r>
+            <a:endParaRPr lang="en-US" sz="1450" dirty="0"/>
+          </a:p>
+        </p:txBody>
+      </p:sp>
+      <p:sp>
+        <p:nvSpPr>
+          <p:cNvPr id="9" name="Text 7"/>
+          <p:cNvSpPr/>
+          <p:nvPr/>
+        </p:nvSpPr>
+        <p:spPr>
+          <a:xfrm>
+            <a:off x="7863840" y="2130552"/>
+            <a:ext cx="3520440" cy="3794760"/>
+          </a:xfrm>
+          <a:prstGeom prst="rect">
+            <a:avLst/>
+          </a:prstGeom>
+          <a:noFill/>
+          <a:ln/>
+        </p:spPr>
+        <p:txBody>
+          <a:bodyPr wrap="square" lIns="0" tIns="0" rIns="0" bIns="0" rtlCol="0" anchor="t"/>
+          <a:lstStyle/>
+          <a:p>
+            <a:pPr marL="152400" indent="-152400">
+              <a:spcAft>
+                <a:spcPts val="500"/>
+              </a:spcAft>
+              <a:buSzPct val="100000"/>
+              <a:buChar char="•"/>
+            </a:pPr>
+            <a:r>
+              <a:rPr lang="en-US" sz="1250" dirty="0">
+                <a:solidFill>
+                  <a:srgbClr val="26303B"/>
+                </a:solidFill>
+                <a:latin typeface="Calibri" pitchFamily="34" charset="0"/>
+                <a:ea typeface="Calibri" pitchFamily="34" charset="-122"/>
+                <a:cs typeface="Calibri" pitchFamily="34" charset="-120"/>
+              </a:rPr>
+              <a:t>Inc. 1: antropocentrismo (UNESCO)</a:t>
+            </a:r>
+            <a:endParaRPr lang="en-US" sz="1250" dirty="0"/>
+          </a:p>
+          <a:p>
+            <a:pPr marL="152400" indent="-152400">
+              <a:spcAft>
+                <a:spcPts val="500"/>
+              </a:spcAft>
+              <a:buSzPct val="100000"/>
+              <a:buChar char="•"/>
+            </a:pPr>
+            <a:r>
+              <a:rPr lang="en-US" sz="1250" dirty="0">
+                <a:solidFill>
+                  <a:srgbClr val="26303B"/>
+                </a:solidFill>
+                <a:latin typeface="Calibri" pitchFamily="34" charset="0"/>
+                <a:ea typeface="Calibri" pitchFamily="34" charset="-122"/>
+                <a:cs typeface="Calibri" pitchFamily="34" charset="-120"/>
+              </a:rPr>
+              <a:t>Inc. 2: integrità (AI for Skills)</a:t>
+            </a:r>
+            <a:endParaRPr lang="en-US" sz="1250" dirty="0"/>
+          </a:p>
+          <a:p>
+            <a:pPr marL="152400" indent="-152400">
+              <a:spcAft>
+                <a:spcPts val="500"/>
+              </a:spcAft>
+              <a:buSzPct val="100000"/>
+              <a:buChar char="•"/>
+            </a:pPr>
+            <a:r>
+              <a:rPr lang="en-US" sz="1250" dirty="0">
+                <a:solidFill>
+                  <a:srgbClr val="26303B"/>
+                </a:solidFill>
+                <a:latin typeface="Calibri" pitchFamily="34" charset="0"/>
+                <a:ea typeface="Calibri" pitchFamily="34" charset="-122"/>
+                <a:cs typeface="Calibri" pitchFamily="34" charset="-120"/>
+              </a:rPr>
+              <a:t>Inc. 3: equità (GEM) + TVET</a:t>
+            </a:r>
+            <a:endParaRPr lang="en-US" sz="1250" dirty="0"/>
+          </a:p>
+          <a:p>
+            <a:pPr marL="152400" indent="-152400">
+              <a:spcAft>
+                <a:spcPts val="500"/>
+              </a:spcAft>
+              <a:buSzPct val="100000"/>
+              <a:buChar char="•"/>
+            </a:pPr>
+            <a:r>
+              <a:rPr lang="en-US" sz="1250" dirty="0">
+                <a:solidFill>
+                  <a:srgbClr val="26303B"/>
+                </a:solidFill>
+                <a:latin typeface="Calibri" pitchFamily="34" charset="0"/>
+                <a:ea typeface="Calibri" pitchFamily="34" charset="-122"/>
+                <a:cs typeface="Calibri" pitchFamily="34" charset="-120"/>
+              </a:rPr>
+              <a:t>Inc. 4: apprendimento reale (OCSE)</a:t>
+            </a:r>
+            <a:endParaRPr lang="en-US" sz="1250" dirty="0"/>
+          </a:p>
+          <a:p>
+            <a:pPr marL="152400" indent="-152400">
+              <a:spcAft>
+                <a:spcPts val="500"/>
+              </a:spcAft>
+              <a:buSzPct val="100000"/>
+              <a:buChar char="•"/>
+            </a:pPr>
+            <a:r>
+              <a:rPr lang="en-US" sz="1250" dirty="0">
+                <a:solidFill>
+                  <a:srgbClr val="26303B"/>
+                </a:solidFill>
+                <a:latin typeface="Calibri" pitchFamily="34" charset="0"/>
+                <a:ea typeface="Calibri" pitchFamily="34" charset="-122"/>
+                <a:cs typeface="Calibri" pitchFamily="34" charset="-120"/>
+              </a:rPr>
+              <a:t>Inc. 5: cittadinanza (MOOC)</a:t>
+            </a:r>
+            <a:endParaRPr lang="en-US" sz="1250" dirty="0"/>
+          </a:p>
+          <a:p>
+            <a:pPr marL="152400" indent="-152400">
+              <a:spcAft>
+                <a:spcPts val="500"/>
+              </a:spcAft>
+              <a:buSzPct val="100000"/>
+              <a:buChar char="•"/>
+            </a:pPr>
+            <a:r>
+              <a:rPr lang="en-US" sz="1250" b="1" dirty="0">
+                <a:solidFill>
+                  <a:srgbClr val="26303B"/>
+                </a:solidFill>
+                <a:latin typeface="Calibri" pitchFamily="34" charset="0"/>
+                <a:ea typeface="Calibri" pitchFamily="34" charset="-122"/>
+                <a:cs typeface="Calibri" pitchFamily="34" charset="-120"/>
+              </a:rPr>
+              <a:t>Inc. 6: dal docente alla scuola</a:t>
+            </a:r>
+            <a:endParaRPr lang="en-US" sz="1250" dirty="0"/>
+          </a:p>
+        </p:txBody>
+      </p:sp>
+    </p:spTree>
+  </p:cSld>
+  <p:clrMapOvr>
+    <a:masterClrMapping/>
+  </p:clrMapOvr>
+</p:sld>
+</file>
+
+<file path=ppt/slides/slide8.xml><?xml version="1.0" encoding="utf-8"?>
+<p:sld xmlns:a="http://schemas.openxmlformats.org/drawingml/2006/main" xmlns:r="http://schemas.openxmlformats.org/officeDocument/2006/relationships" xmlns:p="http://schemas.openxmlformats.org/presentationml/2006/main">
+  <p:cSld name="Slide 8">
+    <p:bg>
+      <p:bgPr>
+        <a:solidFill>
           <a:srgbClr val="1E2761"/>
         </a:solidFill>
       </p:bgPr>
